--- a/docs/Templates/project-poster-tempalte.pptx
+++ b/docs/Templates/project-poster-tempalte.pptx
@@ -107,6 +107,11 @@
       </a:defRPr>
     </a:lvl9pPr>
   </p:defaultTextStyle>
+  <p:extLst>
+    <p:ext uri="{EFAFB233-063F-42B5-8137-9DF3F51BA10A}">
+      <p15:sldGuideLst xmlns:p15="http://schemas.microsoft.com/office/powerpoint/2012/main"/>
+    </p:ext>
+  </p:extLst>
 </p:presentation>
 </file>
 
@@ -192,7 +197,7 @@
           <a:p>
             <a:fld id="{2F9781CB-E638-AC4E-B8EC-984A76828676}" type="datetimeFigureOut">
               <a:rPr lang="en-US" smtClean="0"/>
-              <a:t>10/1/26</a:t>
+              <a:t>10/8/26</a:t>
             </a:fld>
             <a:endParaRPr lang="en-US"/>
           </a:p>
@@ -1557,7 +1562,7 @@
           <a:p>
             <a:fld id="{7E70713F-4B5C-AD41-A9C1-0EDA460603EE}" type="datetimeFigureOut">
               <a:rPr lang="en-US" smtClean="0"/>
-              <a:t>10/1/26</a:t>
+              <a:t>10/8/26</a:t>
             </a:fld>
             <a:endParaRPr lang="en-US"/>
           </a:p>
@@ -1727,7 +1732,7 @@
           <a:p>
             <a:fld id="{7E70713F-4B5C-AD41-A9C1-0EDA460603EE}" type="datetimeFigureOut">
               <a:rPr lang="en-US" smtClean="0"/>
-              <a:t>10/1/26</a:t>
+              <a:t>10/8/26</a:t>
             </a:fld>
             <a:endParaRPr lang="en-US"/>
           </a:p>
@@ -1907,7 +1912,7 @@
           <a:p>
             <a:fld id="{7E70713F-4B5C-AD41-A9C1-0EDA460603EE}" type="datetimeFigureOut">
               <a:rPr lang="en-US" smtClean="0"/>
-              <a:t>10/1/26</a:t>
+              <a:t>10/8/26</a:t>
             </a:fld>
             <a:endParaRPr lang="en-US"/>
           </a:p>
@@ -2099,7 +2104,7 @@
           <a:p>
             <a:fld id="{7E70713F-4B5C-AD41-A9C1-0EDA460603EE}" type="datetimeFigureOut">
               <a:rPr lang="en-US" smtClean="0"/>
-              <a:t>10/1/26</a:t>
+              <a:t>10/8/26</a:t>
             </a:fld>
             <a:endParaRPr lang="en-US"/>
           </a:p>
@@ -2453,7 +2458,7 @@
           <a:p>
             <a:fld id="{7E70713F-4B5C-AD41-A9C1-0EDA460603EE}" type="datetimeFigureOut">
               <a:rPr lang="en-US" smtClean="0"/>
-              <a:t>10/1/26</a:t>
+              <a:t>10/8/26</a:t>
             </a:fld>
             <a:endParaRPr lang="en-US"/>
           </a:p>
@@ -2685,7 +2690,7 @@
           <a:p>
             <a:fld id="{7E70713F-4B5C-AD41-A9C1-0EDA460603EE}" type="datetimeFigureOut">
               <a:rPr lang="en-US" smtClean="0"/>
-              <a:t>10/1/26</a:t>
+              <a:t>10/8/26</a:t>
             </a:fld>
             <a:endParaRPr lang="en-US"/>
           </a:p>
@@ -3052,7 +3057,7 @@
           <a:p>
             <a:fld id="{7E70713F-4B5C-AD41-A9C1-0EDA460603EE}" type="datetimeFigureOut">
               <a:rPr lang="en-US" smtClean="0"/>
-              <a:t>10/1/26</a:t>
+              <a:t>10/8/26</a:t>
             </a:fld>
             <a:endParaRPr lang="en-US"/>
           </a:p>
@@ -3170,7 +3175,7 @@
           <a:p>
             <a:fld id="{7E70713F-4B5C-AD41-A9C1-0EDA460603EE}" type="datetimeFigureOut">
               <a:rPr lang="en-US" smtClean="0"/>
-              <a:t>10/1/26</a:t>
+              <a:t>10/8/26</a:t>
             </a:fld>
             <a:endParaRPr lang="en-US"/>
           </a:p>
@@ -3265,7 +3270,7 @@
           <a:p>
             <a:fld id="{7E70713F-4B5C-AD41-A9C1-0EDA460603EE}" type="datetimeFigureOut">
               <a:rPr lang="en-US" smtClean="0"/>
-              <a:t>10/1/26</a:t>
+              <a:t>10/8/26</a:t>
             </a:fld>
             <a:endParaRPr lang="en-US"/>
           </a:p>
@@ -3542,7 +3547,7 @@
           <a:p>
             <a:fld id="{7E70713F-4B5C-AD41-A9C1-0EDA460603EE}" type="datetimeFigureOut">
               <a:rPr lang="en-US" smtClean="0"/>
-              <a:t>10/1/26</a:t>
+              <a:t>10/8/26</a:t>
             </a:fld>
             <a:endParaRPr lang="en-US"/>
           </a:p>
@@ -3755,7 +3760,7 @@
           <a:p>
             <a:fld id="{7E70713F-4B5C-AD41-A9C1-0EDA460603EE}" type="datetimeFigureOut">
               <a:rPr lang="en-US" smtClean="0"/>
-              <a:t>10/1/26</a:t>
+              <a:t>10/8/26</a:t>
             </a:fld>
             <a:endParaRPr lang="en-US"/>
           </a:p>
@@ -4686,7 +4691,7 @@
           <a:p>
             <a:pPr algn="ctr"/>
             <a:r>
-              <a:rPr lang="en-US" sz="3200" dirty="0">
+              <a:rPr lang="en-US" sz="3200" b="1" dirty="0">
                 <a:solidFill>
                   <a:schemeClr val="tx1"/>
                 </a:solidFill>
@@ -4925,6 +4930,166 @@
           </p:txBody>
         </p:sp>
       </p:grpSp>
+      <p:sp>
+        <p:nvSpPr>
+          <p:cNvPr id="13" name="TextBox 12">
+            <a:extLst>
+              <a:ext uri="{FF2B5EF4-FFF2-40B4-BE49-F238E27FC236}">
+                <a16:creationId xmlns:a16="http://schemas.microsoft.com/office/drawing/2014/main" id="{9EC58C13-E2F0-38F2-BE1B-7BB99133B9E5}"/>
+              </a:ext>
+            </a:extLst>
+          </p:cNvPr>
+          <p:cNvSpPr txBox="1"/>
+          <p:nvPr/>
+        </p:nvSpPr>
+        <p:spPr>
+          <a:xfrm>
+            <a:off x="2202874" y="4405744"/>
+            <a:ext cx="2784764" cy="584775"/>
+          </a:xfrm>
+          <a:prstGeom prst="rect">
+            <a:avLst/>
+          </a:prstGeom>
+          <a:noFill/>
+        </p:spPr>
+        <p:txBody>
+          <a:bodyPr wrap="square" rtlCol="0">
+            <a:spAutoFit/>
+          </a:bodyPr>
+          <a:lstStyle/>
+          <a:p>
+            <a:pPr algn="ctr"/>
+            <a:r>
+              <a:rPr lang="en-US" sz="3200" b="1" dirty="0">
+                <a:solidFill>
+                  <a:srgbClr val="002060"/>
+                </a:solidFill>
+              </a:rPr>
+              <a:t>STUDENTS</a:t>
+            </a:r>
+          </a:p>
+        </p:txBody>
+      </p:sp>
+      <p:sp>
+        <p:nvSpPr>
+          <p:cNvPr id="17" name="TextBox 16">
+            <a:extLst>
+              <a:ext uri="{FF2B5EF4-FFF2-40B4-BE49-F238E27FC236}">
+                <a16:creationId xmlns:a16="http://schemas.microsoft.com/office/drawing/2014/main" id="{114D8927-421D-132B-30DD-C0DECF1225BE}"/>
+              </a:ext>
+            </a:extLst>
+          </p:cNvPr>
+          <p:cNvSpPr txBox="1"/>
+          <p:nvPr/>
+        </p:nvSpPr>
+        <p:spPr>
+          <a:xfrm>
+            <a:off x="9712038" y="4396253"/>
+            <a:ext cx="2784764" cy="584775"/>
+          </a:xfrm>
+          <a:prstGeom prst="rect">
+            <a:avLst/>
+          </a:prstGeom>
+          <a:noFill/>
+        </p:spPr>
+        <p:txBody>
+          <a:bodyPr wrap="square" rtlCol="0">
+            <a:spAutoFit/>
+          </a:bodyPr>
+          <a:lstStyle/>
+          <a:p>
+            <a:pPr algn="ctr"/>
+            <a:r>
+              <a:rPr lang="en-US" sz="3200" b="1" dirty="0">
+                <a:solidFill>
+                  <a:srgbClr val="002060"/>
+                </a:solidFill>
+              </a:rPr>
+              <a:t>INNOVATION</a:t>
+            </a:r>
+          </a:p>
+        </p:txBody>
+      </p:sp>
+      <p:sp>
+        <p:nvSpPr>
+          <p:cNvPr id="25" name="TextBox 24">
+            <a:extLst>
+              <a:ext uri="{FF2B5EF4-FFF2-40B4-BE49-F238E27FC236}">
+                <a16:creationId xmlns:a16="http://schemas.microsoft.com/office/drawing/2014/main" id="{4D3A5CA1-6A1D-A450-A745-A29C2F565D5D}"/>
+              </a:ext>
+            </a:extLst>
+          </p:cNvPr>
+          <p:cNvSpPr txBox="1"/>
+          <p:nvPr/>
+        </p:nvSpPr>
+        <p:spPr>
+          <a:xfrm>
+            <a:off x="17576645" y="4428013"/>
+            <a:ext cx="2784764" cy="584775"/>
+          </a:xfrm>
+          <a:prstGeom prst="rect">
+            <a:avLst/>
+          </a:prstGeom>
+          <a:noFill/>
+        </p:spPr>
+        <p:txBody>
+          <a:bodyPr wrap="square" rtlCol="0">
+            <a:spAutoFit/>
+          </a:bodyPr>
+          <a:lstStyle/>
+          <a:p>
+            <a:pPr algn="ctr"/>
+            <a:r>
+              <a:rPr lang="en-US" sz="3200" b="1" dirty="0">
+                <a:solidFill>
+                  <a:srgbClr val="002060"/>
+                </a:solidFill>
+              </a:rPr>
+              <a:t>RESEARCH</a:t>
+            </a:r>
+          </a:p>
+        </p:txBody>
+      </p:sp>
+      <p:sp>
+        <p:nvSpPr>
+          <p:cNvPr id="26" name="TextBox 25">
+            <a:extLst>
+              <a:ext uri="{FF2B5EF4-FFF2-40B4-BE49-F238E27FC236}">
+                <a16:creationId xmlns:a16="http://schemas.microsoft.com/office/drawing/2014/main" id="{6A124A98-D633-909B-F752-74C8912A4A84}"/>
+              </a:ext>
+            </a:extLst>
+          </p:cNvPr>
+          <p:cNvSpPr txBox="1"/>
+          <p:nvPr/>
+        </p:nvSpPr>
+        <p:spPr>
+          <a:xfrm>
+            <a:off x="25176018" y="4414407"/>
+            <a:ext cx="2784764" cy="584775"/>
+          </a:xfrm>
+          <a:prstGeom prst="rect">
+            <a:avLst/>
+          </a:prstGeom>
+          <a:noFill/>
+        </p:spPr>
+        <p:txBody>
+          <a:bodyPr wrap="square" rtlCol="0">
+            <a:spAutoFit/>
+          </a:bodyPr>
+          <a:lstStyle/>
+          <a:p>
+            <a:pPr algn="ctr"/>
+            <a:r>
+              <a:rPr lang="en-US" sz="3200" b="1" dirty="0">
+                <a:solidFill>
+                  <a:srgbClr val="002060"/>
+                </a:solidFill>
+              </a:rPr>
+              <a:t>IMPACT</a:t>
+            </a:r>
+          </a:p>
+        </p:txBody>
+      </p:sp>
     </p:spTree>
     <p:extLst>
       <p:ext uri="{BB962C8B-B14F-4D97-AF65-F5344CB8AC3E}">
